--- a/docs/arc-hackathon-presentation.pptx
+++ b/docs/arc-hackathon-presentation.pptx
@@ -2,17 +2,17 @@
 <file path=ppt/presentation.xml><?xml version="1.0" encoding="utf-8"?>
 <p:presentation xmlns:p="http://schemas.openxmlformats.org/presentationml/2006/main">
   <p:sldMasterIdLst>
-    <p:sldMasterId xmlns:r="http://schemas.openxmlformats.org/officeDocument/2006/relationships" id="2147483648" r:id="R937156ed5f9a4810"/>
+    <p:sldMasterId xmlns:r="http://schemas.openxmlformats.org/officeDocument/2006/relationships" id="2147483648" r:id="Rcd38f4be8a894da9"/>
   </p:sldMasterIdLst>
   <p:notesMasterIdLst>
-    <p:notesMasterId xmlns:r="http://schemas.openxmlformats.org/officeDocument/2006/relationships" r:id="R0c02b6ba15464356"/>
+    <p:notesMasterId xmlns:r="http://schemas.openxmlformats.org/officeDocument/2006/relationships" r:id="Rac7f54b6cfaa4649"/>
   </p:notesMasterIdLst>
   <p:sldIdLst>
-    <p:sldId xmlns:r="http://schemas.openxmlformats.org/officeDocument/2006/relationships" id="256" r:id="R0cd482c84aa84be5"/>
-    <p:sldId xmlns:r="http://schemas.openxmlformats.org/officeDocument/2006/relationships" id="257" r:id="Rf75356160fa34226"/>
-    <p:sldId xmlns:r="http://schemas.openxmlformats.org/officeDocument/2006/relationships" id="258" r:id="Rbd5e751c3f8f42e8"/>
-    <p:sldId xmlns:r="http://schemas.openxmlformats.org/officeDocument/2006/relationships" id="259" r:id="R677738234dc44086"/>
-    <p:sldId xmlns:r="http://schemas.openxmlformats.org/officeDocument/2006/relationships" id="260" r:id="Rac4b28e546ac4759"/>
+    <p:sldId xmlns:r="http://schemas.openxmlformats.org/officeDocument/2006/relationships" id="256" r:id="Rd4066b421c274b9b"/>
+    <p:sldId xmlns:r="http://schemas.openxmlformats.org/officeDocument/2006/relationships" id="257" r:id="R0bb134bb0a2f4913"/>
+    <p:sldId xmlns:r="http://schemas.openxmlformats.org/officeDocument/2006/relationships" id="258" r:id="Rf47ab4e8011b4287"/>
+    <p:sldId xmlns:r="http://schemas.openxmlformats.org/officeDocument/2006/relationships" id="259" r:id="Rc3af4666aab1474f"/>
+    <p:sldId xmlns:r="http://schemas.openxmlformats.org/officeDocument/2006/relationships" id="260" r:id="R8e4c2e62854b4bba"/>
   </p:sldIdLst>
   <p:sldSz cx="12192000" cy="6858000"/>
   <p:notesSz cx="6858000" cy="9144000"/>
@@ -464,6 +464,15 @@
               <a:t>Slide: Arc Hackathon Export</a:t>
             </a:r>
           </a:p>
+          <a:p xmlns:a="http://schemas.openxmlformats.org/drawingml/2006/main">
+            <a:r>
+              <a:t>
+[Sources]
+Local repository: C:/Users/Nexus/Documents/arc-hackathon-export
+Arc overview: https://docs.arc.io/arc-chain
+App Kit: https://docs.arc.io/app-kit</a:t>
+            </a:r>
+          </a:p>
         </p:txBody>
       </p:sp>
       <p:sp>
@@ -549,6 +558,15 @@
               <a:t>Slide: A verifiable Arc workflow demo</a:t>
             </a:r>
           </a:p>
+          <a:p xmlns:a="http://schemas.openxmlformats.org/drawingml/2006/main">
+            <a:r>
+              <a:t>
+[Sources]
+Local repository: C:/Users/Nexus/Documents/arc-hackathon-export
+App Kit capabilities: https://docs.arc.io/app-kit
+Arc payments: https://docs.arc.io/build/payments</a:t>
+            </a:r>
+          </a:p>
         </p:txBody>
       </p:sp>
       <p:sp>
@@ -634,6 +652,15 @@
               <a:t>Slide: The repo covers end-to-end Arc activity</a:t>
             </a:r>
           </a:p>
+          <a:p xmlns:a="http://schemas.openxmlformats.org/drawingml/2006/main">
+            <a:r>
+              <a:t>
+[Sources]
+Local repository: C:/Users/Nexus/Documents/arc-hackathon-export
+Arc stablecoin model: https://docs.arc.io/arc/concepts/stablecoin-native-model
+Contract addresses: https://docs.arc.io/arc/references/contract-addresses</a:t>
+            </a:r>
+          </a:p>
         </p:txBody>
       </p:sp>
       <p:sp>
@@ -719,6 +746,15 @@
               <a:t>Slide: Evidence is visible on ArcScan</a:t>
             </a:r>
           </a:p>
+          <a:p xmlns:a="http://schemas.openxmlformats.org/drawingml/2006/main">
+            <a:r>
+              <a:t>
+[Sources]
+Local repository: C:/Users/Nexus/Documents/arc-hackathon-export
+ArcScan: https://testnet.arcscan.app
+Arc network: https://docs.arc.io/arc-chain</a:t>
+            </a:r>
+          </a:p>
         </p:txBody>
       </p:sp>
       <p:sp>
@@ -802,6 +838,15 @@
           <a:p xmlns:a="http://schemas.openxmlformats.org/drawingml/2006/main">
             <a:r>
               <a:t>Slide: The submission is clean and reproducible</a:t>
+            </a:r>
+          </a:p>
+          <a:p xmlns:a="http://schemas.openxmlformats.org/drawingml/2006/main">
+            <a:r>
+              <a:t>
+[Sources]
+Local repository: C:/Users/Nexus/Documents/arc-hackathon-export
+Build on Arc: https://docs.arc.io/build
+StableFX overview: https://developers.circle.com/stablefx</a:t>
             </a:r>
           </a:p>
         </p:txBody>
@@ -869,7 +914,7 @@
   </p:cSld>
   <p:clrMap bg1="lt1" tx1="dk1" bg2="lt2" tx2="dk2" accent1="accent1" accent2="accent2" accent3="accent3" accent4="accent4" accent5="accent5" accent6="accent6" hlink="hlink" folHlink="folHlink"/>
   <p:sldLayoutIdLst>
-    <p:sldLayoutId xmlns:r="http://schemas.openxmlformats.org/officeDocument/2006/relationships" id="2147483649" r:id="R0b2a18ab2d60432c"/>
+    <p:sldLayoutId xmlns:r="http://schemas.openxmlformats.org/officeDocument/2006/relationships" id="2147483649" r:id="R1ff98e32f18b47b8"/>
   </p:sldLayoutIdLst>
   <p:txStyles>
     <p:titleStyle>
@@ -1479,6 +1524,7 @@
           <a:lstStyle xmlns:a="http://schemas.openxmlformats.org/drawingml/2006/main"/>
           <a:p xmlns:a="http://schemas.openxmlformats.org/drawingml/2006/main">
             <a:pPr algn="l">
+              <a:buNone/>
               <a:defRPr sz="4350" b="1">
                 <a:solidFill>
                   <a:srgbClr val="0F172A"/>
@@ -1529,6 +1575,7 @@
           <a:lstStyle xmlns:a="http://schemas.openxmlformats.org/drawingml/2006/main"/>
           <a:p xmlns:a="http://schemas.openxmlformats.org/drawingml/2006/main">
             <a:pPr algn="l">
+              <a:buNone/>
               <a:defRPr sz="1950" b="0">
                 <a:solidFill>
                   <a:srgbClr val="334155"/>
@@ -1579,6 +1626,7 @@
           <a:lstStyle xmlns:a="http://schemas.openxmlformats.org/drawingml/2006/main"/>
           <a:p xmlns:a="http://schemas.openxmlformats.org/drawingml/2006/main">
             <a:pPr algn="l">
+              <a:buNone/>
               <a:defRPr sz="1800" b="0">
                 <a:solidFill>
                   <a:srgbClr val="475569"/>
@@ -1591,7 +1639,7 @@
                   <a:srgbClr val="475569"/>
                 </a:solidFill>
               </a:rPr>
-              <a:t>A compact workspace for App Kit, CCTP, token activity, and custom Arc contract flows.</a:t>
+              <a:t>A compact workspace for Arc-native payments, treasury, cross-chain routing, FX, and custom contract flows.</a:t>
             </a:r>
           </a:p>
         </p:txBody>
@@ -1629,6 +1677,7 @@
           <a:lstStyle xmlns:a="http://schemas.openxmlformats.org/drawingml/2006/main"/>
           <a:p xmlns:a="http://schemas.openxmlformats.org/drawingml/2006/main">
             <a:pPr algn="l">
+              <a:buNone/>
               <a:defRPr sz="1500" b="1">
                 <a:solidFill>
                   <a:srgbClr val="166534"/>
@@ -1739,6 +1788,7 @@
           <a:lstStyle xmlns:a="http://schemas.openxmlformats.org/drawingml/2006/main"/>
           <a:p xmlns:a="http://schemas.openxmlformats.org/drawingml/2006/main">
             <a:pPr algn="l">
+              <a:buNone/>
               <a:defRPr sz="3000" b="1">
                 <a:solidFill>
                   <a:srgbClr val="0F172A"/>
@@ -1789,6 +1839,7 @@
           <a:lstStyle xmlns:a="http://schemas.openxmlformats.org/drawingml/2006/main"/>
           <a:p xmlns:a="http://schemas.openxmlformats.org/drawingml/2006/main">
             <a:pPr algn="l">
+              <a:buNone/>
               <a:defRPr sz="1800" b="0">
                 <a:solidFill>
                   <a:srgbClr val="334155"/>
@@ -1839,6 +1890,7 @@
           <a:lstStyle xmlns:a="http://schemas.openxmlformats.org/drawingml/2006/main"/>
           <a:p xmlns:a="http://schemas.openxmlformats.org/drawingml/2006/main">
             <a:pPr algn="l">
+              <a:buNone/>
               <a:defRPr sz="1800" b="1">
                 <a:solidFill>
                   <a:srgbClr val="166534"/>
@@ -1889,6 +1941,7 @@
           <a:lstStyle xmlns:a="http://schemas.openxmlformats.org/drawingml/2006/main"/>
           <a:p xmlns:a="http://schemas.openxmlformats.org/drawingml/2006/main">
             <a:pPr algn="l">
+              <a:buNone/>
               <a:defRPr sz="1575" b="0">
                 <a:solidFill>
                   <a:srgbClr val="334155"/>
@@ -1970,6 +2023,7 @@
           <a:lstStyle xmlns:a="http://schemas.openxmlformats.org/drawingml/2006/main"/>
           <a:p xmlns:a="http://schemas.openxmlformats.org/drawingml/2006/main">
             <a:pPr algn="l">
+              <a:buNone/>
               <a:defRPr sz="1800" b="1">
                 <a:solidFill>
                   <a:srgbClr val="166534"/>
@@ -2020,6 +2074,7 @@
           <a:lstStyle xmlns:a="http://schemas.openxmlformats.org/drawingml/2006/main"/>
           <a:p xmlns:a="http://schemas.openxmlformats.org/drawingml/2006/main">
             <a:pPr algn="l">
+              <a:buNone/>
               <a:defRPr sz="1575" b="0">
                 <a:solidFill>
                   <a:srgbClr val="334155"/>
@@ -2032,7 +2087,7 @@
                   <a:srgbClr val="334155"/>
                 </a:solidFill>
               </a:rPr>
-              <a:t>Contracts model invoices, escrow, marketplace orders, auctions, support, and access roles.</a:t>
+              <a:t>Contracts model invoices, escrow, payment links, usage billing, payroll, refunds, and other Arc-native flows.</a:t>
             </a:r>
           </a:p>
         </p:txBody>
@@ -2101,6 +2156,7 @@
           <a:lstStyle xmlns:a="http://schemas.openxmlformats.org/drawingml/2006/main"/>
           <a:p xmlns:a="http://schemas.openxmlformats.org/drawingml/2006/main">
             <a:pPr algn="l">
+              <a:buNone/>
               <a:defRPr sz="1800" b="1">
                 <a:solidFill>
                   <a:srgbClr val="166534"/>
@@ -2151,6 +2207,7 @@
           <a:lstStyle xmlns:a="http://schemas.openxmlformats.org/drawingml/2006/main"/>
           <a:p xmlns:a="http://schemas.openxmlformats.org/drawingml/2006/main">
             <a:pPr algn="l">
+              <a:buNone/>
               <a:defRPr sz="1575" b="0">
                 <a:solidFill>
                   <a:srgbClr val="334155"/>
@@ -2232,6 +2289,7 @@
           <a:lstStyle xmlns:a="http://schemas.openxmlformats.org/drawingml/2006/main"/>
           <a:p xmlns:a="http://schemas.openxmlformats.org/drawingml/2006/main">
             <a:pPr algn="l">
+              <a:buNone/>
               <a:defRPr sz="975" b="0">
                 <a:solidFill>
                   <a:srgbClr val="64748B"/>
@@ -2282,6 +2340,7 @@
           <a:lstStyle xmlns:a="http://schemas.openxmlformats.org/drawingml/2006/main"/>
           <a:p xmlns:a="http://schemas.openxmlformats.org/drawingml/2006/main">
             <a:pPr algn="r">
+              <a:buNone/>
               <a:defRPr sz="975" b="0">
                 <a:solidFill>
                   <a:srgbClr val="64748B"/>
@@ -2392,6 +2451,7 @@
           <a:lstStyle xmlns:a="http://schemas.openxmlformats.org/drawingml/2006/main"/>
           <a:p xmlns:a="http://schemas.openxmlformats.org/drawingml/2006/main">
             <a:pPr algn="l">
+              <a:buNone/>
               <a:defRPr sz="3000" b="1">
                 <a:solidFill>
                   <a:srgbClr val="0F172A"/>
@@ -2442,6 +2502,7 @@
           <a:lstStyle xmlns:a="http://schemas.openxmlformats.org/drawingml/2006/main"/>
           <a:p xmlns:a="http://schemas.openxmlformats.org/drawingml/2006/main">
             <a:pPr algn="l">
+              <a:buNone/>
               <a:defRPr sz="1800" b="0">
                 <a:solidFill>
                   <a:srgbClr val="334155"/>
@@ -2492,6 +2553,7 @@
           <a:lstStyle xmlns:a="http://schemas.openxmlformats.org/drawingml/2006/main"/>
           <a:p xmlns:a="http://schemas.openxmlformats.org/drawingml/2006/main">
             <a:pPr algn="l">
+              <a:buNone/>
               <a:defRPr sz="1800" b="1">
                 <a:solidFill>
                   <a:srgbClr val="166534"/>
@@ -2542,6 +2604,7 @@
           <a:lstStyle xmlns:a="http://schemas.openxmlformats.org/drawingml/2006/main"/>
           <a:p xmlns:a="http://schemas.openxmlformats.org/drawingml/2006/main">
             <a:pPr algn="l">
+              <a:buNone/>
               <a:defRPr sz="1575" b="0">
                 <a:solidFill>
                   <a:srgbClr val="334155"/>
@@ -2554,7 +2617,7 @@
                   <a:srgbClr val="334155"/>
                 </a:solidFill>
               </a:rPr>
-              <a:t>App Kit Send, Swap, Bridge, Unified Balance, and raw CCTP helpers.</a:t>
+              <a:t>App Kit Send, Swap, Bridge, Unified Balance, cross-chain routing, and USDC/EURC FX flows.</a:t>
             </a:r>
           </a:p>
         </p:txBody>
@@ -2623,6 +2686,7 @@
           <a:lstStyle xmlns:a="http://schemas.openxmlformats.org/drawingml/2006/main"/>
           <a:p xmlns:a="http://schemas.openxmlformats.org/drawingml/2006/main">
             <a:pPr algn="l">
+              <a:buNone/>
               <a:defRPr sz="1800" b="1">
                 <a:solidFill>
                   <a:srgbClr val="166534"/>
@@ -2673,6 +2737,7 @@
           <a:lstStyle xmlns:a="http://schemas.openxmlformats.org/drawingml/2006/main"/>
           <a:p xmlns:a="http://schemas.openxmlformats.org/drawingml/2006/main">
             <a:pPr algn="l">
+              <a:buNone/>
               <a:defRPr sz="1575" b="0">
                 <a:solidFill>
                   <a:srgbClr val="334155"/>
@@ -2685,7 +2750,7 @@
                   <a:srgbClr val="334155"/>
                 </a:solidFill>
               </a:rPr>
-              <a:t>Invoice, escrow, marketplace, auction, support, access, rewards, coupons, and more.</a:t>
+              <a:t>Invoice, escrow, payment links, usage billing, payroll, refunds, marketplace, and more.</a:t>
             </a:r>
           </a:p>
         </p:txBody>
@@ -2754,6 +2819,7 @@
           <a:lstStyle xmlns:a="http://schemas.openxmlformats.org/drawingml/2006/main"/>
           <a:p xmlns:a="http://schemas.openxmlformats.org/drawingml/2006/main">
             <a:pPr algn="l">
+              <a:buNone/>
               <a:defRPr sz="1800" b="1">
                 <a:solidFill>
                   <a:srgbClr val="166534"/>
@@ -2804,6 +2870,7 @@
           <a:lstStyle xmlns:a="http://schemas.openxmlformats.org/drawingml/2006/main"/>
           <a:p xmlns:a="http://schemas.openxmlformats.org/drawingml/2006/main">
             <a:pPr algn="l">
+              <a:buNone/>
               <a:defRPr sz="1575" b="0">
                 <a:solidFill>
                   <a:srgbClr val="334155"/>
@@ -2885,6 +2952,7 @@
           <a:lstStyle xmlns:a="http://schemas.openxmlformats.org/drawingml/2006/main"/>
           <a:p xmlns:a="http://schemas.openxmlformats.org/drawingml/2006/main">
             <a:pPr algn="l">
+              <a:buNone/>
               <a:defRPr sz="975" b="0">
                 <a:solidFill>
                   <a:srgbClr val="64748B"/>
@@ -2935,6 +3003,7 @@
           <a:lstStyle xmlns:a="http://schemas.openxmlformats.org/drawingml/2006/main"/>
           <a:p xmlns:a="http://schemas.openxmlformats.org/drawingml/2006/main">
             <a:pPr algn="r">
+              <a:buNone/>
               <a:defRPr sz="975" b="0">
                 <a:solidFill>
                   <a:srgbClr val="64748B"/>
@@ -3045,6 +3114,7 @@
           <a:lstStyle xmlns:a="http://schemas.openxmlformats.org/drawingml/2006/main"/>
           <a:p xmlns:a="http://schemas.openxmlformats.org/drawingml/2006/main">
             <a:pPr algn="l">
+              <a:buNone/>
               <a:defRPr sz="3000" b="1">
                 <a:solidFill>
                   <a:srgbClr val="0F172A"/>
@@ -3095,6 +3165,7 @@
           <a:lstStyle xmlns:a="http://schemas.openxmlformats.org/drawingml/2006/main"/>
           <a:p xmlns:a="http://schemas.openxmlformats.org/drawingml/2006/main">
             <a:pPr algn="l">
+              <a:buNone/>
               <a:defRPr sz="1800" b="0">
                 <a:solidFill>
                   <a:srgbClr val="334155"/>
@@ -3145,6 +3216,7 @@
           <a:lstStyle xmlns:a="http://schemas.openxmlformats.org/drawingml/2006/main"/>
           <a:p xmlns:a="http://schemas.openxmlformats.org/drawingml/2006/main">
             <a:pPr algn="l">
+              <a:buNone/>
               <a:defRPr sz="1800" b="1">
                 <a:solidFill>
                   <a:srgbClr val="166534"/>
@@ -3195,6 +3267,7 @@
           <a:lstStyle xmlns:a="http://schemas.openxmlformats.org/drawingml/2006/main"/>
           <a:p xmlns:a="http://schemas.openxmlformats.org/drawingml/2006/main">
             <a:pPr algn="l">
+              <a:buNone/>
               <a:defRPr sz="1575" b="0">
                 <a:solidFill>
                   <a:srgbClr val="334155"/>
@@ -3276,6 +3349,7 @@
           <a:lstStyle xmlns:a="http://schemas.openxmlformats.org/drawingml/2006/main"/>
           <a:p xmlns:a="http://schemas.openxmlformats.org/drawingml/2006/main">
             <a:pPr algn="l">
+              <a:buNone/>
               <a:defRPr sz="1800" b="1">
                 <a:solidFill>
                   <a:srgbClr val="166534"/>
@@ -3326,6 +3400,7 @@
           <a:lstStyle xmlns:a="http://schemas.openxmlformats.org/drawingml/2006/main"/>
           <a:p xmlns:a="http://schemas.openxmlformats.org/drawingml/2006/main">
             <a:pPr algn="l">
+              <a:buNone/>
               <a:defRPr sz="1575" b="0">
                 <a:solidFill>
                   <a:srgbClr val="334155"/>
@@ -3407,6 +3482,7 @@
           <a:lstStyle xmlns:a="http://schemas.openxmlformats.org/drawingml/2006/main"/>
           <a:p xmlns:a="http://schemas.openxmlformats.org/drawingml/2006/main">
             <a:pPr algn="l">
+              <a:buNone/>
               <a:defRPr sz="1800" b="1">
                 <a:solidFill>
                   <a:srgbClr val="166534"/>
@@ -3457,6 +3533,7 @@
           <a:lstStyle xmlns:a="http://schemas.openxmlformats.org/drawingml/2006/main"/>
           <a:p xmlns:a="http://schemas.openxmlformats.org/drawingml/2006/main">
             <a:pPr algn="l">
+              <a:buNone/>
               <a:defRPr sz="1575" b="0">
                 <a:solidFill>
                   <a:srgbClr val="334155"/>
@@ -3538,6 +3615,7 @@
           <a:lstStyle xmlns:a="http://schemas.openxmlformats.org/drawingml/2006/main"/>
           <a:p xmlns:a="http://schemas.openxmlformats.org/drawingml/2006/main">
             <a:pPr algn="l">
+              <a:buNone/>
               <a:defRPr sz="975" b="0">
                 <a:solidFill>
                   <a:srgbClr val="64748B"/>
@@ -3588,6 +3666,7 @@
           <a:lstStyle xmlns:a="http://schemas.openxmlformats.org/drawingml/2006/main"/>
           <a:p xmlns:a="http://schemas.openxmlformats.org/drawingml/2006/main">
             <a:pPr algn="r">
+              <a:buNone/>
               <a:defRPr sz="975" b="0">
                 <a:solidFill>
                   <a:srgbClr val="64748B"/>
@@ -3698,6 +3777,7 @@
           <a:lstStyle xmlns:a="http://schemas.openxmlformats.org/drawingml/2006/main"/>
           <a:p xmlns:a="http://schemas.openxmlformats.org/drawingml/2006/main">
             <a:pPr algn="l">
+              <a:buNone/>
               <a:defRPr sz="3000" b="1">
                 <a:solidFill>
                   <a:srgbClr val="0F172A"/>
@@ -3748,6 +3828,7 @@
           <a:lstStyle xmlns:a="http://schemas.openxmlformats.org/drawingml/2006/main"/>
           <a:p xmlns:a="http://schemas.openxmlformats.org/drawingml/2006/main">
             <a:pPr algn="l">
+              <a:buNone/>
               <a:defRPr sz="1800" b="0">
                 <a:solidFill>
                   <a:srgbClr val="334155"/>
@@ -3798,6 +3879,7 @@
           <a:lstStyle xmlns:a="http://schemas.openxmlformats.org/drawingml/2006/main"/>
           <a:p xmlns:a="http://schemas.openxmlformats.org/drawingml/2006/main">
             <a:pPr algn="l">
+              <a:buNone/>
               <a:defRPr sz="1800" b="1">
                 <a:solidFill>
                   <a:srgbClr val="166534"/>
@@ -3848,6 +3930,7 @@
           <a:lstStyle xmlns:a="http://schemas.openxmlformats.org/drawingml/2006/main"/>
           <a:p xmlns:a="http://schemas.openxmlformats.org/drawingml/2006/main">
             <a:pPr algn="l">
+              <a:buNone/>
               <a:defRPr sz="1575" b="0">
                 <a:solidFill>
                   <a:srgbClr val="334155"/>
@@ -3929,6 +4012,7 @@
           <a:lstStyle xmlns:a="http://schemas.openxmlformats.org/drawingml/2006/main"/>
           <a:p xmlns:a="http://schemas.openxmlformats.org/drawingml/2006/main">
             <a:pPr algn="l">
+              <a:buNone/>
               <a:defRPr sz="1800" b="1">
                 <a:solidFill>
                   <a:srgbClr val="166534"/>
@@ -3979,6 +4063,7 @@
           <a:lstStyle xmlns:a="http://schemas.openxmlformats.org/drawingml/2006/main"/>
           <a:p xmlns:a="http://schemas.openxmlformats.org/drawingml/2006/main">
             <a:pPr algn="l">
+              <a:buNone/>
               <a:defRPr sz="1575" b="0">
                 <a:solidFill>
                   <a:srgbClr val="334155"/>
@@ -4060,6 +4145,7 @@
           <a:lstStyle xmlns:a="http://schemas.openxmlformats.org/drawingml/2006/main"/>
           <a:p xmlns:a="http://schemas.openxmlformats.org/drawingml/2006/main">
             <a:pPr algn="l">
+              <a:buNone/>
               <a:defRPr sz="1800" b="1">
                 <a:solidFill>
                   <a:srgbClr val="166534"/>
@@ -4110,6 +4196,7 @@
           <a:lstStyle xmlns:a="http://schemas.openxmlformats.org/drawingml/2006/main"/>
           <a:p xmlns:a="http://schemas.openxmlformats.org/drawingml/2006/main">
             <a:pPr algn="l">
+              <a:buNone/>
               <a:defRPr sz="1575" b="0">
                 <a:solidFill>
                   <a:srgbClr val="334155"/>
@@ -4122,7 +4209,7 @@
                   <a:srgbClr val="334155"/>
                 </a:solidFill>
               </a:rPr>
-              <a:t>Tighten security and turn the strongest non-custodial flows into a focused product demo.</a:t>
+              <a:t>Focus the strongest Arc-native flows into a secure, non-custodial treasury and settlement demo.</a:t>
             </a:r>
           </a:p>
         </p:txBody>
@@ -4191,6 +4278,7 @@
           <a:lstStyle xmlns:a="http://schemas.openxmlformats.org/drawingml/2006/main"/>
           <a:p xmlns:a="http://schemas.openxmlformats.org/drawingml/2006/main">
             <a:pPr algn="l">
+              <a:buNone/>
               <a:defRPr sz="975" b="0">
                 <a:solidFill>
                   <a:srgbClr val="64748B"/>
@@ -4241,6 +4329,7 @@
           <a:lstStyle xmlns:a="http://schemas.openxmlformats.org/drawingml/2006/main"/>
           <a:p xmlns:a="http://schemas.openxmlformats.org/drawingml/2006/main">
             <a:pPr algn="r">
+              <a:buNone/>
               <a:defRPr sz="975" b="0">
                 <a:solidFill>
                   <a:srgbClr val="64748B"/>
